--- a/prompt_engineering/pe-3-structure-Delimiters_OutputFormatConstraint -v2.pptx
+++ b/prompt_engineering/pe-3-structure-Delimiters_OutputFormatConstraint -v2.pptx
@@ -234,7 +234,7 @@
           <a:p>
             <a:fld id="{7BAEECA8-D063-486F-AE31-5020270C1449}" type="datetimeFigureOut">
               <a:rPr lang="en-US" smtClean="0"/>
-              <a:t>6/16/2026</a:t>
+              <a:t>7/10/2026</a:t>
             </a:fld>
             <a:endParaRPr lang="en-US"/>
           </a:p>
@@ -476,7 +476,7 @@
           <a:p>
             <a:fld id="{6383FAE1-13DE-4511-8C1B-C8AFB720664C}" type="datetimeFigureOut">
               <a:rPr lang="en-US" smtClean="0"/>
-              <a:t>6/16/2026</a:t>
+              <a:t>7/10/2026</a:t>
             </a:fld>
             <a:endParaRPr lang="en-US"/>
           </a:p>
@@ -674,7 +674,7 @@
           <a:p>
             <a:fld id="{6383FAE1-13DE-4511-8C1B-C8AFB720664C}" type="datetimeFigureOut">
               <a:rPr lang="en-US" smtClean="0"/>
-              <a:t>6/16/2026</a:t>
+              <a:t>7/10/2026</a:t>
             </a:fld>
             <a:endParaRPr lang="en-US"/>
           </a:p>
@@ -882,7 +882,7 @@
           <a:p>
             <a:fld id="{6383FAE1-13DE-4511-8C1B-C8AFB720664C}" type="datetimeFigureOut">
               <a:rPr lang="en-US" smtClean="0"/>
-              <a:t>6/16/2026</a:t>
+              <a:t>7/10/2026</a:t>
             </a:fld>
             <a:endParaRPr lang="en-US"/>
           </a:p>
@@ -1080,7 +1080,7 @@
           <a:p>
             <a:fld id="{6383FAE1-13DE-4511-8C1B-C8AFB720664C}" type="datetimeFigureOut">
               <a:rPr lang="en-US" smtClean="0"/>
-              <a:t>6/16/2026</a:t>
+              <a:t>7/10/2026</a:t>
             </a:fld>
             <a:endParaRPr lang="en-US"/>
           </a:p>
@@ -1355,7 +1355,7 @@
           <a:p>
             <a:fld id="{6383FAE1-13DE-4511-8C1B-C8AFB720664C}" type="datetimeFigureOut">
               <a:rPr lang="en-US" smtClean="0"/>
-              <a:t>6/16/2026</a:t>
+              <a:t>7/10/2026</a:t>
             </a:fld>
             <a:endParaRPr lang="en-US"/>
           </a:p>
@@ -1620,7 +1620,7 @@
           <a:p>
             <a:fld id="{6383FAE1-13DE-4511-8C1B-C8AFB720664C}" type="datetimeFigureOut">
               <a:rPr lang="en-US" smtClean="0"/>
-              <a:t>6/16/2026</a:t>
+              <a:t>7/10/2026</a:t>
             </a:fld>
             <a:endParaRPr lang="en-US"/>
           </a:p>
@@ -2032,7 +2032,7 @@
           <a:p>
             <a:fld id="{6383FAE1-13DE-4511-8C1B-C8AFB720664C}" type="datetimeFigureOut">
               <a:rPr lang="en-US" smtClean="0"/>
-              <a:t>6/16/2026</a:t>
+              <a:t>7/10/2026</a:t>
             </a:fld>
             <a:endParaRPr lang="en-US"/>
           </a:p>
@@ -2173,7 +2173,7 @@
           <a:p>
             <a:fld id="{6383FAE1-13DE-4511-8C1B-C8AFB720664C}" type="datetimeFigureOut">
               <a:rPr lang="en-US" smtClean="0"/>
-              <a:t>6/16/2026</a:t>
+              <a:t>7/10/2026</a:t>
             </a:fld>
             <a:endParaRPr lang="en-US"/>
           </a:p>
@@ -2286,7 +2286,7 @@
           <a:p>
             <a:fld id="{6383FAE1-13DE-4511-8C1B-C8AFB720664C}" type="datetimeFigureOut">
               <a:rPr lang="en-US" smtClean="0"/>
-              <a:t>6/16/2026</a:t>
+              <a:t>7/10/2026</a:t>
             </a:fld>
             <a:endParaRPr lang="en-US"/>
           </a:p>
@@ -2597,7 +2597,7 @@
           <a:p>
             <a:fld id="{6383FAE1-13DE-4511-8C1B-C8AFB720664C}" type="datetimeFigureOut">
               <a:rPr lang="en-US" smtClean="0"/>
-              <a:t>6/16/2026</a:t>
+              <a:t>7/10/2026</a:t>
             </a:fld>
             <a:endParaRPr lang="en-US"/>
           </a:p>
@@ -2888,7 +2888,7 @@
           <a:p>
             <a:fld id="{6383FAE1-13DE-4511-8C1B-C8AFB720664C}" type="datetimeFigureOut">
               <a:rPr lang="en-US" smtClean="0"/>
-              <a:t>6/16/2026</a:t>
+              <a:t>7/10/2026</a:t>
             </a:fld>
             <a:endParaRPr lang="en-US"/>
           </a:p>
@@ -3132,7 +3132,7 @@
           <a:p>
             <a:fld id="{6383FAE1-13DE-4511-8C1B-C8AFB720664C}" type="datetimeFigureOut">
               <a:rPr lang="en-US" smtClean="0"/>
-              <a:t>6/16/2026</a:t>
+              <a:t>7/10/2026</a:t>
             </a:fld>
             <a:endParaRPr lang="en-US"/>
           </a:p>
